--- a/ppt/Room 1-8-Dr. Saleem Mustafa.pptx
+++ b/ppt/Room 1-8-Dr. Saleem Mustafa.pptx
@@ -6451,7 +6451,7 @@
                   <a:srgbClr val="156082"/>
                 </a:solidFill>
               </a:rPr>
-              <a:t>Already implemented and measured on the target device — not a plan, a result.</a:t>
+              <a:t>Running on a ₨40,000 phone, driving a real app. Every number below was measured, not estimated.</a:t>
             </a:r>
           </a:p>
         </p:txBody>
@@ -6465,6 +6465,80 @@
         <p:spPr>
           <a:xfrm>
             <a:off x="841248" y="2121408"/>
+            <a:ext cx="2542032" cy="1417320"/>
+          </a:xfrm>
+          <a:prstGeom prst="roundRect">
+            <a:avLst/>
+          </a:prstGeom>
+          <a:solidFill>
+            <a:srgbClr val="1E7A5E"/>
+          </a:solidFill>
+          <a:ln>
+            <a:noFill/>
+          </a:ln>
+          <a:effectLst/>
+        </p:spPr>
+        <p:style>
+          <a:lnRef idx="1">
+            <a:schemeClr val="accent1"/>
+          </a:lnRef>
+          <a:fillRef idx="3">
+            <a:schemeClr val="accent1"/>
+          </a:fillRef>
+          <a:effectRef idx="2">
+            <a:schemeClr val="accent1"/>
+          </a:effectRef>
+          <a:fontRef idx="minor">
+            <a:schemeClr val="lt1"/>
+          </a:fontRef>
+        </p:style>
+        <p:txBody>
+          <a:bodyPr rtlCol="0" anchor="ctr" wrap="square"/>
+          <a:lstStyle/>
+          <a:p>
+            <a:pPr algn="ctr"/>
+            <a:r>
+              <a:rPr sz="3000" b="1">
+                <a:solidFill>
+                  <a:srgbClr val="FFFFFF"/>
+                </a:solidFill>
+              </a:rPr>
+              <a:t>0</a:t>
+            </a:r>
+          </a:p>
+          <a:p>
+            <a:pPr algn="ctr"/>
+            <a:r>
+              <a:rPr sz="1200" b="1">
+                <a:solidFill>
+                  <a:srgbClr val="FFFFFF"/>
+                </a:solidFill>
+              </a:rPr>
+              <a:t>AI calls on replay</a:t>
+            </a:r>
+          </a:p>
+          <a:p>
+            <a:pPr algn="ctr"/>
+            <a:r>
+              <a:rPr sz="900">
+                <a:solidFill>
+                  <a:srgbClr val="FFFFFF"/>
+                </a:solidFill>
+              </a:rPr>
+              <a:t>confirmed on a live app — not simulated</a:t>
+            </a:r>
+          </a:p>
+        </p:txBody>
+      </p:sp>
+      <p:sp>
+        <p:nvSpPr>
+          <p:cNvPr id="10" name="Rounded Rectangle 9"/>
+          <p:cNvSpPr/>
+          <p:nvPr/>
+        </p:nvSpPr>
+        <p:spPr>
+          <a:xfrm>
+            <a:off x="3493008" y="2121408"/>
             <a:ext cx="2542032" cy="1417320"/>
           </a:xfrm>
           <a:prstGeom prst="roundRect">
@@ -6503,7 +6577,7 @@
                   <a:srgbClr val="FFFFFF"/>
                 </a:solidFill>
               </a:rPr>
-              <a:t>8,407×</a:t>
+              <a:t>29×</a:t>
             </a:r>
           </a:p>
           <a:p>
@@ -6514,7 +6588,7 @@
                   <a:srgbClr val="FFFFFF"/>
                 </a:solidFill>
               </a:rPr>
-              <a:t>faster on replay</a:t>
+              <a:t>faster, end to end</a:t>
             </a:r>
           </a:p>
           <a:p>
@@ -6525,81 +6599,7 @@
                   <a:srgbClr val="FFFFFF"/>
                 </a:solidFill>
               </a:rPr>
-              <a:t>142,917 ms cold  ➜  17 ms replayed</a:t>
-            </a:r>
-          </a:p>
-        </p:txBody>
-      </p:sp>
-      <p:sp>
-        <p:nvSpPr>
-          <p:cNvPr id="10" name="Rounded Rectangle 9"/>
-          <p:cNvSpPr/>
-          <p:nvPr/>
-        </p:nvSpPr>
-        <p:spPr>
-          <a:xfrm>
-            <a:off x="3493008" y="2121408"/>
-            <a:ext cx="2542032" cy="1417320"/>
-          </a:xfrm>
-          <a:prstGeom prst="roundRect">
-            <a:avLst/>
-          </a:prstGeom>
-          <a:solidFill>
-            <a:srgbClr val="1E7A5E"/>
-          </a:solidFill>
-          <a:ln>
-            <a:noFill/>
-          </a:ln>
-          <a:effectLst/>
-        </p:spPr>
-        <p:style>
-          <a:lnRef idx="1">
-            <a:schemeClr val="accent1"/>
-          </a:lnRef>
-          <a:fillRef idx="3">
-            <a:schemeClr val="accent1"/>
-          </a:fillRef>
-          <a:effectRef idx="2">
-            <a:schemeClr val="accent1"/>
-          </a:effectRef>
-          <a:fontRef idx="minor">
-            <a:schemeClr val="lt1"/>
-          </a:fontRef>
-        </p:style>
-        <p:txBody>
-          <a:bodyPr rtlCol="0" anchor="ctr" wrap="square"/>
-          <a:lstStyle/>
-          <a:p>
-            <a:pPr algn="ctr"/>
-            <a:r>
-              <a:rPr sz="3000" b="1">
-                <a:solidFill>
-                  <a:srgbClr val="FFFFFF"/>
-                </a:solidFill>
-              </a:rPr>
-              <a:t>0</a:t>
-            </a:r>
-          </a:p>
-          <a:p>
-            <a:pPr algn="ctr"/>
-            <a:r>
-              <a:rPr sz="1200" b="1">
-                <a:solidFill>
-                  <a:srgbClr val="FFFFFF"/>
-                </a:solidFill>
-              </a:rPr>
-              <a:t>AI calls on replay</a:t>
-            </a:r>
-          </a:p>
-          <a:p>
-            <a:pPr algn="ctr"/>
-            <a:r>
-              <a:rPr sz="900">
-                <a:solidFill>
-                  <a:srgbClr val="FFFFFF"/>
-                </a:solidFill>
-              </a:rPr>
-              <a:t>target was "fewer"; achieved exactly zero</a:t>
+              <a:t>66 s planned  ➜  2.3 s replayed</a:t>
             </a:r>
           </a:p>
         </p:txBody>
@@ -6725,7 +6725,7 @@
                   <a:srgbClr val="FFFFFF"/>
                 </a:solidFill>
               </a:rPr>
-              <a:t>83 J</a:t>
+              <a:t>39 ms</a:t>
             </a:r>
           </a:p>
           <a:p>
@@ -6736,7 +6736,7 @@
                   <a:srgbClr val="FFFFFF"/>
                 </a:solidFill>
               </a:rPr>
-              <a:t>per planning step</a:t>
+              <a:t>to remember</a:t>
             </a:r>
           </a:p>
           <a:p>
@@ -6747,7 +6747,7 @@
                   <a:srgbClr val="FFFFFF"/>
                 </a:solidFill>
               </a:rPr>
-              <a:t>≈ 831 steps per full battery charge</a:t>
+              <a:t>learning survives the app being killed</a:t>
             </a:r>
           </a:p>
         </p:txBody>
@@ -6795,7 +6795,7 @@
         <p:spPr>
           <a:xfrm>
             <a:off x="841248" y="3858768"/>
-            <a:ext cx="5212080" cy="2194560"/>
+            <a:ext cx="5212080" cy="1783080"/>
           </a:xfrm>
           <a:prstGeom prst="rect">
             <a:avLst/>
@@ -6859,7 +6859,7 @@
             </a:pPr>
             <a:r>
               <a:rPr sz="1150"/>
-              <a:t>✓  Skill compiler + replay — the learning loop closes end to end</a:t>
+              <a:t>✓  Learns a task, then repeats it with no AI — verified on WhatsApp</a:t>
             </a:r>
           </a:p>
           <a:p>
@@ -6870,7 +6870,7 @@
             </a:pPr>
             <a:r>
               <a:rPr sz="1150"/>
-              <a:t>✓  Foreground-service gateway — operates other apps, stoppable by the user</a:t>
+              <a:t>✓  Remembers what it learned in SQLite — survives reboot and force-stop</a:t>
             </a:r>
           </a:p>
         </p:txBody>
@@ -6942,11 +6942,11 @@
                   <a:srgbClr val="A02B93"/>
                 </a:solidFill>
               </a:rPr>
-              <a:t>129   </a:t>
+              <a:t>158   </a:t>
             </a:r>
             <a:r>
               <a:rPr sz="1150"/>
-              <a:t>automated tests passing — 0 failures</a:t>
+              <a:t>automated tests passing — 0 failures, none needing a phone</a:t>
             </a:r>
           </a:p>
           <a:p>
@@ -6961,11 +6961,11 @@
                   <a:srgbClr val="A02B93"/>
                 </a:solidFill>
               </a:rPr>
-              <a:t>28   </a:t>
+              <a:t>12   </a:t>
             </a:r>
             <a:r>
               <a:rPr sz="1150"/>
-              <a:t>documented design decisions, each with evidence</a:t>
+              <a:t>documented design decisions, each with evidence and how to reverse it</a:t>
             </a:r>
           </a:p>
           <a:p>
@@ -6980,7 +6980,7 @@
                   <a:srgbClr val="A02B93"/>
                 </a:solidFill>
               </a:rPr>
-              <a:t>18   </a:t>
+              <a:t>20   </a:t>
             </a:r>
             <a:r>
               <a:rPr sz="1150"/>
@@ -7016,8 +7016,8 @@
         </p:nvSpPr>
         <p:spPr>
           <a:xfrm>
-            <a:off x="6263640" y="5779008"/>
-            <a:ext cx="5120640" cy="347472"/>
+            <a:off x="841248" y="5760720"/>
+            <a:ext cx="10515600" cy="365760"/>
           </a:xfrm>
           <a:prstGeom prst="rect">
             <a:avLst/>
@@ -7037,7 +7037,7 @@
                   <a:srgbClr val="1E7A5E"/>
                 </a:solidFill>
               </a:rPr>
-              <a:t>Half our evaluation runs with no phone attached — so results are reproducible by anyone.</a:t>
+              <a:t>Measured on the device, we found our strongest safeguard had never actually run — Android was silently hiding the data it needed. It passed every unit test. Tests prove code is correct, not that it is reachable.</a:t>
             </a:r>
           </a:p>
         </p:txBody>
@@ -7217,7 +7217,7 @@
                   <a:srgbClr val="1F1F1F"/>
                 </a:solidFill>
               </a:rPr>
-              <a:t>Once AXON has learned a task, it repeats it with ZERO AI calls — measured at 8,407× faster.</a:t>
+              <a:t>Once AXON has learned a task, it repeats it with ZERO AI calls — and remembers it after a restart.</a:t>
             </a:r>
           </a:p>
         </p:txBody>
@@ -16482,7 +16482,7 @@
                     <a:p>
                       <a:r>
                         <a:rPr sz="1100"/>
-                        <a:t>AXON-Bench: benchmark, ablation matrix, results</a:t>
+                        <a:t>Persistent memory + on-device validation of the full loop</a:t>
                       </a:r>
                     </a:p>
                   </a:txBody>
@@ -16801,6 +16801,102 @@
                       <a:headEnd type="none" w="med" len="med"/>
                       <a:tailEnd type="none" w="med" len="med"/>
                     </a:lnB>
+                    <a:solidFill>
+                      <a:srgbClr val="C0E4F5"/>
+                    </a:solidFill>
+                  </a:tcPr>
+                </a:tc>
+                <a:tc>
+                  <a:txBody>
+                    <a:bodyPr/>
+                    <a:lstStyle/>
+                    <a:p/>
+                  </a:txBody>
+                  <a:tcPr>
+                    <a:lnL w="12700" cap="flat" cmpd="sng" algn="ctr">
+                      <a:solidFill>
+                        <a:schemeClr val="tx1"/>
+                      </a:solidFill>
+                      <a:prstDash val="solid"/>
+                      <a:round/>
+                      <a:headEnd type="none" w="med" len="med"/>
+                      <a:tailEnd type="none" w="med" len="med"/>
+                    </a:lnL>
+                    <a:lnR w="12700" cap="flat" cmpd="sng" algn="ctr">
+                      <a:solidFill>
+                        <a:schemeClr val="tx1"/>
+                      </a:solidFill>
+                      <a:prstDash val="solid"/>
+                      <a:round/>
+                      <a:headEnd type="none" w="med" len="med"/>
+                      <a:tailEnd type="none" w="med" len="med"/>
+                    </a:lnR>
+                    <a:lnT w="12700" cap="flat" cmpd="sng" algn="ctr">
+                      <a:solidFill>
+                        <a:schemeClr val="tx1"/>
+                      </a:solidFill>
+                      <a:prstDash val="solid"/>
+                      <a:round/>
+                      <a:headEnd type="none" w="med" len="med"/>
+                      <a:tailEnd type="none" w="med" len="med"/>
+                    </a:lnT>
+                    <a:lnB w="12700" cap="flat" cmpd="sng" algn="ctr">
+                      <a:solidFill>
+                        <a:schemeClr val="tx1"/>
+                      </a:solidFill>
+                      <a:prstDash val="solid"/>
+                      <a:round/>
+                      <a:headEnd type="none" w="med" len="med"/>
+                      <a:tailEnd type="none" w="med" len="med"/>
+                    </a:lnB>
+                    <a:solidFill>
+                      <a:srgbClr val="C0E4F5"/>
+                    </a:solidFill>
+                  </a:tcPr>
+                </a:tc>
+                <a:tc>
+                  <a:txBody>
+                    <a:bodyPr/>
+                    <a:lstStyle/>
+                    <a:p/>
+                  </a:txBody>
+                  <a:tcPr>
+                    <a:lnL w="12700" cap="flat" cmpd="sng" algn="ctr">
+                      <a:solidFill>
+                        <a:schemeClr val="tx1"/>
+                      </a:solidFill>
+                      <a:prstDash val="solid"/>
+                      <a:round/>
+                      <a:headEnd type="none" w="med" len="med"/>
+                      <a:tailEnd type="none" w="med" len="med"/>
+                    </a:lnL>
+                    <a:lnR w="12700" cap="flat" cmpd="sng" algn="ctr">
+                      <a:solidFill>
+                        <a:schemeClr val="tx1"/>
+                      </a:solidFill>
+                      <a:prstDash val="solid"/>
+                      <a:round/>
+                      <a:headEnd type="none" w="med" len="med"/>
+                      <a:tailEnd type="none" w="med" len="med"/>
+                    </a:lnR>
+                    <a:lnT w="12700" cap="flat" cmpd="sng" algn="ctr">
+                      <a:solidFill>
+                        <a:schemeClr val="tx1"/>
+                      </a:solidFill>
+                      <a:prstDash val="solid"/>
+                      <a:round/>
+                      <a:headEnd type="none" w="med" len="med"/>
+                      <a:tailEnd type="none" w="med" len="med"/>
+                    </a:lnT>
+                    <a:lnB w="12700" cap="flat" cmpd="sng" algn="ctr">
+                      <a:solidFill>
+                        <a:schemeClr val="tx1"/>
+                      </a:solidFill>
+                      <a:prstDash val="solid"/>
+                      <a:round/>
+                      <a:headEnd type="none" w="med" len="med"/>
+                      <a:tailEnd type="none" w="med" len="med"/>
+                    </a:lnB>
                     <a:noFill/>
                   </a:tcPr>
                 </a:tc>
@@ -16847,105 +16943,7 @@
                       <a:headEnd type="none" w="med" len="med"/>
                       <a:tailEnd type="none" w="med" len="med"/>
                     </a:lnB>
-                    <a:solidFill>
-                      <a:srgbClr val="E8D4EF"/>
-                    </a:solidFill>
-                  </a:tcPr>
-                </a:tc>
-                <a:tc>
-                  <a:txBody>
-                    <a:bodyPr/>
-                    <a:lstStyle/>
-                    <a:p/>
-                  </a:txBody>
-                  <a:tcPr>
-                    <a:lnL w="12700" cap="flat" cmpd="sng" algn="ctr">
-                      <a:solidFill>
-                        <a:schemeClr val="tx1"/>
-                      </a:solidFill>
-                      <a:prstDash val="solid"/>
-                      <a:round/>
-                      <a:headEnd type="none" w="med" len="med"/>
-                      <a:tailEnd type="none" w="med" len="med"/>
-                    </a:lnL>
-                    <a:lnR w="12700" cap="flat" cmpd="sng" algn="ctr">
-                      <a:solidFill>
-                        <a:schemeClr val="tx1"/>
-                      </a:solidFill>
-                      <a:prstDash val="solid"/>
-                      <a:round/>
-                      <a:headEnd type="none" w="med" len="med"/>
-                      <a:tailEnd type="none" w="med" len="med"/>
-                    </a:lnR>
-                    <a:lnT w="12700" cap="flat" cmpd="sng" algn="ctr">
-                      <a:solidFill>
-                        <a:schemeClr val="tx1"/>
-                      </a:solidFill>
-                      <a:prstDash val="solid"/>
-                      <a:round/>
-                      <a:headEnd type="none" w="med" len="med"/>
-                      <a:tailEnd type="none" w="med" len="med"/>
-                    </a:lnT>
-                    <a:lnB w="12700" cap="flat" cmpd="sng" algn="ctr">
-                      <a:solidFill>
-                        <a:schemeClr val="tx1"/>
-                      </a:solidFill>
-                      <a:prstDash val="solid"/>
-                      <a:round/>
-                      <a:headEnd type="none" w="med" len="med"/>
-                      <a:tailEnd type="none" w="med" len="med"/>
-                    </a:lnB>
-                    <a:solidFill>
-                      <a:srgbClr val="E8D4EF"/>
-                    </a:solidFill>
-                  </a:tcPr>
-                </a:tc>
-                <a:tc>
-                  <a:txBody>
-                    <a:bodyPr/>
-                    <a:lstStyle/>
-                    <a:p/>
-                  </a:txBody>
-                  <a:tcPr>
-                    <a:lnL w="12700" cap="flat" cmpd="sng" algn="ctr">
-                      <a:solidFill>
-                        <a:schemeClr val="tx1"/>
-                      </a:solidFill>
-                      <a:prstDash val="solid"/>
-                      <a:round/>
-                      <a:headEnd type="none" w="med" len="med"/>
-                      <a:tailEnd type="none" w="med" len="med"/>
-                    </a:lnL>
-                    <a:lnR w="12700" cap="flat" cmpd="sng" algn="ctr">
-                      <a:solidFill>
-                        <a:schemeClr val="tx1"/>
-                      </a:solidFill>
-                      <a:prstDash val="solid"/>
-                      <a:round/>
-                      <a:headEnd type="none" w="med" len="med"/>
-                      <a:tailEnd type="none" w="med" len="med"/>
-                    </a:lnR>
-                    <a:lnT w="12700" cap="flat" cmpd="sng" algn="ctr">
-                      <a:solidFill>
-                        <a:schemeClr val="tx1"/>
-                      </a:solidFill>
-                      <a:prstDash val="solid"/>
-                      <a:round/>
-                      <a:headEnd type="none" w="med" len="med"/>
-                      <a:tailEnd type="none" w="med" len="med"/>
-                    </a:lnT>
-                    <a:lnB w="12700" cap="flat" cmpd="sng" algn="ctr">
-                      <a:solidFill>
-                        <a:schemeClr val="tx1"/>
-                      </a:solidFill>
-                      <a:prstDash val="solid"/>
-                      <a:round/>
-                      <a:headEnd type="none" w="med" len="med"/>
-                      <a:tailEnd type="none" w="med" len="med"/>
-                    </a:lnB>
-                    <a:solidFill>
-                      <a:srgbClr val="E8D4EF"/>
-                    </a:solidFill>
+                    <a:noFill/>
                   </a:tcPr>
                 </a:tc>
                 <a:tc>
@@ -17153,7 +17151,7 @@
                     <a:p>
                       <a:r>
                         <a:rPr sz="1100"/>
-                        <a:t>Optimisation, user testing, thesis &amp; defence</a:t>
+                        <a:t>AXON-Bench, ablation matrix, user testing, thesis &amp; defence</a:t>
                       </a:r>
                     </a:p>
                   </a:txBody>
@@ -17518,7 +17516,9 @@
                       <a:headEnd type="none" w="med" len="med"/>
                       <a:tailEnd type="none" w="med" len="med"/>
                     </a:lnB>
-                    <a:noFill/>
+                    <a:solidFill>
+                      <a:srgbClr val="E8D4EF"/>
+                    </a:solidFill>
                   </a:tcPr>
                 </a:tc>
                 <a:tc gridSpan="2">
@@ -17564,7 +17564,9 @@
                       <a:headEnd type="none" w="med" len="med"/>
                       <a:tailEnd type="none" w="med" len="med"/>
                     </a:lnB>
-                    <a:noFill/>
+                    <a:solidFill>
+                      <a:srgbClr val="E8D4EF"/>
+                    </a:solidFill>
                   </a:tcPr>
                 </a:tc>
                 <a:tc hMerge="1">
@@ -17860,7 +17862,7 @@
                   <a:srgbClr val="156082"/>
                 </a:solidFill>
               </a:rPr>
-              <a:t>Two-semester plan. Phases 0–5 are already complete (shaded darker) — the core contributions are locked; the remaining work is evaluation and write-up.</a:t>
+              <a:t>Two-semester plan. Tasks 1–7 are already complete (shaded darker) — the core contributions are built and measured on hardware; what remains is evaluation at scale, user testing and the thesis.</a:t>
             </a:r>
           </a:p>
         </p:txBody>
